--- a/docs/presentation/DXA_QC_pitch.pptx
+++ b/docs/presentation/DXA_QC_pitch.pptx
@@ -5606,7 +5606,13 @@
           <a:p/>
           <a:p>
             <a:r>
-              <a:t>Если спросят: API: POST /batch → задание → отчёт, оверлеи, SR; документация на /docs.</a:t>
+              <a:t>Где нет Docker, тот же сервис ставится установщиком для Windows, а показать его с телефона можно через Telegram-бота. Конвейер везде один, отчёты совпадают побитово.</a:t>
+            </a:r>
+          </a:p>
+          <a:p/>
+          <a:p>
+            <a:r>
+              <a:t>Если спросят: API: POST /batch → задание → отчёт, оверлеи, SR; документация на /docs. Бот передаёт файлы через Telegram, поэтому он только для обезличенных данных и по умолчанию выключен; основной контур работает без сети, как требует ТЗ 3.2.</a:t>
             </a:r>
           </a:p>
         </p:txBody>
@@ -5834,7 +5840,7 @@
           <a:p/>
           <a:p>
             <a:r>
-              <a:t>Если спросят: Если демонстрация вживую невозможна — те же шаги на слайдах «Кейсы» и «Интерфейс».</a:t>
+              <a:t>Если спросят: Нет Docker — настольное приложение; нет сети — слайды «Кейсы» и «Интерфейс»; с телефона — бот @LCT_bone_density_research_bot, команда /demo.</a:t>
             </a:r>
           </a:p>
         </p:txBody>
@@ -30851,7 +30857,7 @@
                 <a:cs typeface="Consolas"/>
                 <a:ea typeface="Consolas"/>
               </a:rPr>
-              <a:t>ВЕБ-ИНТЕРФЕЙС</a:t>
+              <a:t>ВЕБ-ПРИЛОЖЕНИЕ</a:t>
             </a:r>
           </a:p>
         </p:txBody>
@@ -30893,7 +30899,7 @@
                 <a:cs typeface="Segoe UI"/>
                 <a:ea typeface="Segoe UI"/>
               </a:rPr>
-              <a:t>Папка или zip; снимок с разметкой, нормой и близостью к границе; фильтры, клавиатура.</a:t>
+              <a:t>Папка или zip; снимок с разметкой и нормой; ставится из браузера как приложение.</a:t>
             </a:r>
           </a:p>
         </p:txBody>
@@ -31111,7 +31117,7 @@
                 <a:cs typeface="Consolas"/>
                 <a:ea typeface="Consolas"/>
               </a:rPr>
-              <a:t>PACS</a:t>
+              <a:t>PACS И API</a:t>
             </a:r>
           </a:p>
         </p:txBody>
@@ -31153,7 +31159,7 @@
                 <a:cs typeface="Segoe UI"/>
                 <a:ea typeface="Segoe UI"/>
               </a:rPr>
-              <a:t>DICOM SR в том же исследовании, заключение по-русски, UNVERIFIED.</a:t>
+              <a:t>DICOM SR в том же исследовании; POST /batch → отчёт, оверлеи, SR.</a:t>
             </a:r>
           </a:p>
         </p:txBody>
@@ -31241,7 +31247,7 @@
                 <a:cs typeface="Consolas"/>
                 <a:ea typeface="Consolas"/>
               </a:rPr>
-              <a:t>API</a:t>
+              <a:t>БЕЗ DOCKER</a:t>
             </a:r>
           </a:p>
         </p:txBody>
@@ -31283,7 +31289,7 @@
                 <a:cs typeface="Segoe UI"/>
                 <a:ea typeface="Segoe UI"/>
               </a:rPr>
-              <a:t>POST /batch → задание → /jobs/{id}/report, /overlays, /sr; документация /docs.</a:t>
+              <a:t>Установщик для Windows и Telegram-бот: тот же конвейер, отчёт побитово тот же.</a:t>
             </a:r>
           </a:p>
         </p:txBody>
@@ -35676,7 +35682,7 @@
                 <a:cs typeface="Segoe UI"/>
                 <a:ea typeface="Segoe UI"/>
               </a:rPr>
-              <a:t>Если показ вживую невозможен — те же шаги на слайдах «Кейсы» и «Интерфейс»; сценарий — docs/DEMO.md.</a:t>
+              <a:t>Нет Docker — настольное приложение; нет сети — слайды «Кейсы» и «Интерфейс»; с телефона — бот, команда /demo.</a:t>
             </a:r>
           </a:p>
         </p:txBody>
@@ -35690,7 +35696,7 @@
         <p:spPr>
           <a:xfrm>
             <a:off x="6949440" y="2743200"/>
-            <a:ext cx="4663440" cy="1188720"/>
+            <a:ext cx="4663440" cy="1463040"/>
           </a:xfrm>
           <a:prstGeom prst="roundRect">
             <a:avLst>
@@ -35820,7 +35826,7 @@
         <p:spPr>
           <a:xfrm>
             <a:off x="7150608" y="3566160"/>
-            <a:ext cx="4261104" cy="228600"/>
+            <a:ext cx="4261104" cy="502920"/>
           </a:xfrm>
           <a:prstGeom prst="rect">
             <a:avLst/>
@@ -35848,7 +35854,7 @@
                 <a:cs typeface="Segoe UI"/>
                 <a:ea typeface="Segoe UI"/>
               </a:rPr>
-              <a:t>README · USER_GUIDE · DEPLOYMENT · TRAINING · DEMO</a:t>
+              <a:t>README · REVIEW · USER_GUIDE · DESKTOP · TELEGRAM_BOT</a:t>
             </a:r>
           </a:p>
         </p:txBody>
@@ -36177,7 +36183,7 @@
                 <a:cs typeface="Segoe UI Semibold"/>
                 <a:ea typeface="Segoe UI Semibold"/>
               </a:rPr>
-              <a:t>API</a:t>
+              <a:t>Интерфейсы</a:t>
             </a:r>
           </a:p>
         </p:txBody>
@@ -36219,7 +36225,7 @@
                 <a:cs typeface="Segoe UI"/>
                 <a:ea typeface="Segoe UI"/>
               </a:rPr>
-              <a:t>пакет заданием</a:t>
+              <a:t>веб, Windows, бот, API</a:t>
             </a:r>
           </a:p>
         </p:txBody>
@@ -36387,7 +36393,7 @@
                 <a:cs typeface="Segoe UI"/>
                 <a:ea typeface="Segoe UI"/>
               </a:rPr>
-              <a:t>63 проверки</a:t>
+              <a:t>сервис — 64, бот — 27</a:t>
             </a:r>
           </a:p>
         </p:txBody>
